--- a/course/高校实验室安全/课件/002_实验室安全法律法规体系.pptx
+++ b/course/高校实验室安全/课件/002_实验室安全法律法规体系.pptx
@@ -527,12 +527,6 @@
               <a:t>其他国家和地区也有各自的实验室安全法规和标准，例如针对实验室化学品暴露的专门标准。学习时可以把它们作为了解国际通行做法的背景，但其中的数值、豁免条件和机构要求不能直接搬用。在我国高校做实验，必须遵守我国法律法规、国家标准和本校规定。</a:t>
             </a:r>
           </a:p>
-          <a:p/>
-          <a:p>
-            <a:r>
-              <a:t>来源：合并了 1 个原知识点，最佳讲解取自 Acids, Bases &amp; Solvents Safety 11（详见 来源.tsv）</a:t>
-            </a:r>
-          </a:p>
         </p:txBody>
       </p:sp>
       <p:sp>
@@ -608,12 +602,6 @@
               <a:t>教育部门对高校实验室安全工作进行指导和督查，学校内部则通过三级管理落实责任。各部门的具体职责以现行法律法规和机构职能规定为准。了解监管分工，有助于明白各项手续（如采购备案、许可、检验）为什么必须办、找谁办。</a:t>
             </a:r>
           </a:p>
-          <a:p/>
-          <a:p>
-            <a:r>
-              <a:t>来源：合并了 1 个原知识点，最佳讲解取自 Laboratory Ergonomics &amp; RSI 32（详见 来源.tsv）</a:t>
-            </a:r>
-          </a:p>
         </p:txBody>
       </p:sp>
       <p:sp>
@@ -689,12 +677,6 @@
               <a:t>各高校据此制定本校的实验室安全管理办法、准入制度和各类专项规定，学院和实验室再制定具体的操作规程。对学生来说，本校和本实验室的制度是最具体、最直接要遵守的规定。第 3 课将详细介绍《高等学校实验室安全规范》和检查项目表。</a:t>
             </a:r>
           </a:p>
-          <a:p/>
-          <a:p>
-            <a:r>
-              <a:t>来源：补充知识点（依据《高等学校实验室安全规范》，原视频未涉及）</a:t>
-            </a:r>
-          </a:p>
         </p:txBody>
       </p:sp>
       <p:sp>
@@ -1000,12 +982,6 @@
               <a:t>学校、学院和实验室依据上述法规制定本单位的管理办法和操作规程，内容最具体，是每个人日常必须遵守的规定。下位规定不得与上位法冲突；遇到不一致时，按上位法和更严格的要求执行。</a:t>
             </a:r>
           </a:p>
-          <a:p/>
-          <a:p>
-            <a:r>
-              <a:t>来源：补充知识点（依据《中华人民共和国立法法》《中华人民共和国标准化法》的层级规定，原视频未涉及）</a:t>
-            </a:r>
-          </a:p>
         </p:txBody>
       </p:sp>
       <p:sp>
@@ -1086,12 +1062,6 @@
               <a:t>在高校，这些责任通过学校—学院—实验室三级管理逐级落实，实验室负责人是本实验室安全的第一责任人（第 4 课详讲）。具体条款以现行文本和本校规定为准。</a:t>
             </a:r>
           </a:p>
-          <a:p/>
-          <a:p>
-            <a:r>
-              <a:t>来源：合并了 2 个原知识点，最佳讲解取自 Laboratory Ergonomics &amp; RSI 14（详见 来源.tsv）</a:t>
-            </a:r>
-          </a:p>
         </p:txBody>
       </p:sp>
       <p:sp>
@@ -1172,12 +1142,6 @@
               <a:t>具体条款和限值以现行文本和本校规定为准。</a:t>
             </a:r>
           </a:p>
-          <a:p/>
-          <a:p>
-            <a:r>
-              <a:t>来源：合并了 1 个原知识点，最佳讲解取自 Laboratory Ergonomics &amp; RSI 09（详见 来源.tsv）</a:t>
-            </a:r>
-          </a:p>
         </p:txBody>
       </p:sp>
       <p:sp>
@@ -1258,12 +1222,6 @@
               <a:t>火灾自动报警系统、自动喷水灭火系统、灭火器、消防安全标志等都有相应的国家标准（如 GB 4351-2023、GB 13495.1-2015，以现行文本为准）。消防安全的具体知识在第 4 章讲解。</a:t>
             </a:r>
           </a:p>
-          <a:p/>
-          <a:p>
-            <a:r>
-              <a:t>来源：合并了 1 个原知识点，最佳讲解取自 Laboratory Ergonomics &amp; RSI 04（详见 来源.tsv）</a:t>
-            </a:r>
-          </a:p>
         </p:txBody>
       </p:sp>
       <p:sp>
@@ -1344,12 +1302,6 @@
               <a:t>废弃危险化学品的处置依照生态环境保护法律法规执行。化学品安全的具体要求在第 5 章讲解。</a:t>
             </a:r>
           </a:p>
-          <a:p/>
-          <a:p>
-            <a:r>
-              <a:t>来源：补充知识点（依据《中华人民共和国危险化学品安全法》《危险化学品安全管理条例》等，原视频未涉及）</a:t>
-            </a:r>
-          </a:p>
         </p:txBody>
       </p:sp>
       <p:sp>
@@ -1430,12 +1382,6 @@
               <a:t>涉及转基因的研究，依据生物安全法、《农业转基因生物安全管理条例》（涉及农业转基因生物时）和单位生物安全委员会的审查要求开展。生物安全的具体要求在第 6 章讲解。</a:t>
             </a:r>
           </a:p>
-          <a:p/>
-          <a:p>
-            <a:r>
-              <a:t>来源：补充知识点（依据《中华人民共和国生物安全法》《病原微生物实验室生物安全管理条例》等，原视频未涉及）</a:t>
-            </a:r>
-          </a:p>
         </p:txBody>
       </p:sp>
       <p:sp>
@@ -1516,12 +1462,6 @@
               <a:t>实验室产生的废液、废弃化学品、沾染危险物质的包装物等属于危险废物的，依照《中华人民共和国固体废物污染环境防治法》和《国家危险废物名录》（以现行版本为准）管理，分类收集、规范贮存、交有资质的单位处置，严禁倒入下水道或混入生活垃圾。</a:t>
             </a:r>
           </a:p>
-          <a:p/>
-          <a:p>
-            <a:r>
-              <a:t>来源：补充知识点（依据《中华人民共和国放射性污染防治法》《中华人民共和国特种设备安全法》《中华人民共和国固体废物污染环境防治法》等，原视频未涉及）</a:t>
-            </a:r>
-          </a:p>
         </p:txBody>
       </p:sp>
       <p:sp>
@@ -1595,12 +1535,6 @@
           <a:p>
             <a:r>
               <a:t>行业实践和技术进步往往走在前面，推动标准不断修订完善。很多标准近年已更新（如 GB 2894-2025《安全色和安全标志》、GB 14866-2023《眼面防护具通用技术规范》，以现行文本为准），引用和执行时要确认使用的是现行版本，已废止的标准不再作为依据。</a:t>
-            </a:r>
-          </a:p>
-          <a:p/>
-          <a:p>
-            <a:r>
-              <a:t>来源：合并了 2 个原知识点，最佳讲解取自 Lab Safety Training - Essential Protocols 14（详见 来源.tsv）</a:t>
             </a:r>
           </a:p>
         </p:txBody>
